--- a/ДПО/Лабораторная работа №1.pptx
+++ b/ДПО/Лабораторная работа №1.pptx
@@ -110,7 +110,7 @@
   </p:defaultTextStyle>
   <p:extLst>
     <p:ext uri="{EFAFB233-063F-42B5-8137-9DF3F51BA10A}">
-      <p15:sldGuideLst xmlns:p15="http://schemas.microsoft.com/office/powerpoint/2012/main" xmlns="">
+      <p15:sldGuideLst xmlns="" xmlns:p15="http://schemas.microsoft.com/office/powerpoint/2012/main">
         <p15:guide id="1" orient="horz" pos="2160">
           <p15:clr>
             <a:srgbClr val="A4A3A4"/>
@@ -309,7 +309,7 @@
             <a:fld id="{7F8C04BF-8A92-46C4-A5A4-15600A46B760}" type="datetimeFigureOut">
               <a:rPr lang="ru-RU" smtClean="0"/>
               <a:pPr/>
-              <a:t>11.04.2026</a:t>
+              <a:t>13.04.2026</a:t>
             </a:fld>
             <a:endParaRPr lang="ru-RU"/>
           </a:p>
@@ -476,7 +476,7 @@
             <a:fld id="{7F8C04BF-8A92-46C4-A5A4-15600A46B760}" type="datetimeFigureOut">
               <a:rPr lang="ru-RU" smtClean="0"/>
               <a:pPr/>
-              <a:t>11.04.2026</a:t>
+              <a:t>13.04.2026</a:t>
             </a:fld>
             <a:endParaRPr lang="ru-RU"/>
           </a:p>
@@ -653,7 +653,7 @@
             <a:fld id="{7F8C04BF-8A92-46C4-A5A4-15600A46B760}" type="datetimeFigureOut">
               <a:rPr lang="ru-RU" smtClean="0"/>
               <a:pPr/>
-              <a:t>11.04.2026</a:t>
+              <a:t>13.04.2026</a:t>
             </a:fld>
             <a:endParaRPr lang="ru-RU"/>
           </a:p>
@@ -820,7 +820,7 @@
             <a:fld id="{7F8C04BF-8A92-46C4-A5A4-15600A46B760}" type="datetimeFigureOut">
               <a:rPr lang="ru-RU" smtClean="0"/>
               <a:pPr/>
-              <a:t>11.04.2026</a:t>
+              <a:t>13.04.2026</a:t>
             </a:fld>
             <a:endParaRPr lang="ru-RU"/>
           </a:p>
@@ -1063,7 +1063,7 @@
             <a:fld id="{7F8C04BF-8A92-46C4-A5A4-15600A46B760}" type="datetimeFigureOut">
               <a:rPr lang="ru-RU" smtClean="0"/>
               <a:pPr/>
-              <a:t>11.04.2026</a:t>
+              <a:t>13.04.2026</a:t>
             </a:fld>
             <a:endParaRPr lang="ru-RU"/>
           </a:p>
@@ -1348,7 +1348,7 @@
             <a:fld id="{7F8C04BF-8A92-46C4-A5A4-15600A46B760}" type="datetimeFigureOut">
               <a:rPr lang="ru-RU" smtClean="0"/>
               <a:pPr/>
-              <a:t>11.04.2026</a:t>
+              <a:t>13.04.2026</a:t>
             </a:fld>
             <a:endParaRPr lang="ru-RU"/>
           </a:p>
@@ -1767,7 +1767,7 @@
             <a:fld id="{7F8C04BF-8A92-46C4-A5A4-15600A46B760}" type="datetimeFigureOut">
               <a:rPr lang="ru-RU" smtClean="0"/>
               <a:pPr/>
-              <a:t>11.04.2026</a:t>
+              <a:t>13.04.2026</a:t>
             </a:fld>
             <a:endParaRPr lang="ru-RU"/>
           </a:p>
@@ -1882,7 +1882,7 @@
             <a:fld id="{7F8C04BF-8A92-46C4-A5A4-15600A46B760}" type="datetimeFigureOut">
               <a:rPr lang="ru-RU" smtClean="0"/>
               <a:pPr/>
-              <a:t>11.04.2026</a:t>
+              <a:t>13.04.2026</a:t>
             </a:fld>
             <a:endParaRPr lang="ru-RU"/>
           </a:p>
@@ -1974,7 +1974,7 @@
             <a:fld id="{7F8C04BF-8A92-46C4-A5A4-15600A46B760}" type="datetimeFigureOut">
               <a:rPr lang="ru-RU" smtClean="0"/>
               <a:pPr/>
-              <a:t>11.04.2026</a:t>
+              <a:t>13.04.2026</a:t>
             </a:fld>
             <a:endParaRPr lang="ru-RU"/>
           </a:p>
@@ -2248,7 +2248,7 @@
             <a:fld id="{7F8C04BF-8A92-46C4-A5A4-15600A46B760}" type="datetimeFigureOut">
               <a:rPr lang="ru-RU" smtClean="0"/>
               <a:pPr/>
-              <a:t>11.04.2026</a:t>
+              <a:t>13.04.2026</a:t>
             </a:fld>
             <a:endParaRPr lang="ru-RU"/>
           </a:p>
@@ -2498,7 +2498,7 @@
             <a:fld id="{7F8C04BF-8A92-46C4-A5A4-15600A46B760}" type="datetimeFigureOut">
               <a:rPr lang="ru-RU" smtClean="0"/>
               <a:pPr/>
-              <a:t>11.04.2026</a:t>
+              <a:t>13.04.2026</a:t>
             </a:fld>
             <a:endParaRPr lang="ru-RU"/>
           </a:p>
@@ -2708,7 +2708,7 @@
             <a:fld id="{7F8C04BF-8A92-46C4-A5A4-15600A46B760}" type="datetimeFigureOut">
               <a:rPr lang="ru-RU" smtClean="0"/>
               <a:pPr/>
-              <a:t>11.04.2026</a:t>
+              <a:t>13.04.2026</a:t>
             </a:fld>
             <a:endParaRPr lang="ru-RU"/>
           </a:p>
@@ -3886,7 +3886,7 @@
         <p:spPr>
           <a:xfrm>
             <a:off x="0" y="3000372"/>
-            <a:ext cx="7643834" cy="2123658"/>
+            <a:ext cx="7643834" cy="2031325"/>
           </a:xfrm>
           <a:prstGeom prst="rect">
             <a:avLst/>
@@ -3903,35 +3903,35 @@
           <a:p>
             <a:pPr algn="just"/>
             <a:r>
-              <a:rPr lang="ru-RU" sz="2200" dirty="0" smtClean="0">
+              <a:rPr lang="ru-RU" dirty="0" smtClean="0">
                 <a:latin typeface="Times New Roman" pitchFamily="18" charset="0"/>
                 <a:cs typeface="Times New Roman" pitchFamily="18" charset="0"/>
               </a:rPr>
               <a:t>Создайте </a:t>
             </a:r>
             <a:r>
-              <a:rPr lang="en-US" sz="2200" dirty="0" smtClean="0">
+              <a:rPr lang="en-US" dirty="0" smtClean="0">
                 <a:latin typeface="Times New Roman" pitchFamily="18" charset="0"/>
                 <a:cs typeface="Times New Roman" pitchFamily="18" charset="0"/>
               </a:rPr>
               <a:t>HTML-</a:t>
             </a:r>
             <a:r>
-              <a:rPr lang="ru-RU" sz="2200" dirty="0" smtClean="0">
+              <a:rPr lang="ru-RU" dirty="0" smtClean="0">
                 <a:latin typeface="Times New Roman" pitchFamily="18" charset="0"/>
                 <a:cs typeface="Times New Roman" pitchFamily="18" charset="0"/>
               </a:rPr>
               <a:t>документ по образцу</a:t>
             </a:r>
             <a:r>
-              <a:rPr lang="en-US" sz="2200" dirty="0" smtClean="0">
+              <a:rPr lang="en-US" dirty="0" smtClean="0">
                 <a:latin typeface="Times New Roman" pitchFamily="18" charset="0"/>
                 <a:cs typeface="Times New Roman" pitchFamily="18" charset="0"/>
               </a:rPr>
               <a:t>. </a:t>
             </a:r>
             <a:r>
-              <a:rPr lang="ru-RU" sz="2200" dirty="0" smtClean="0">
+              <a:rPr lang="ru-RU" dirty="0" smtClean="0">
                 <a:latin typeface="Times New Roman" pitchFamily="18" charset="0"/>
                 <a:cs typeface="Times New Roman" pitchFamily="18" charset="0"/>
               </a:rPr>
@@ -3941,13 +3941,13 @@
           <a:p>
             <a:pPr algn="just"/>
             <a:r>
-              <a:rPr lang="ru-RU" sz="2200" dirty="0" smtClean="0">
+              <a:rPr lang="ru-RU" dirty="0" smtClean="0">
                 <a:latin typeface="Times New Roman" pitchFamily="18" charset="0"/>
                 <a:cs typeface="Times New Roman" pitchFamily="18" charset="0"/>
               </a:rPr>
               <a:t>Используйте</a:t>
             </a:r>
-            <a:endParaRPr lang="ru-RU" sz="2200" dirty="0">
+            <a:endParaRPr lang="ru-RU" dirty="0">
               <a:latin typeface="Times New Roman" pitchFamily="18" charset="0"/>
               <a:cs typeface="Times New Roman" pitchFamily="18" charset="0"/>
             </a:endParaRPr>
@@ -3955,7 +3955,7 @@
           <a:p>
             <a:pPr algn="just"/>
             <a:r>
-              <a:rPr lang="en-US" sz="2200" dirty="0" smtClean="0">
+              <a:rPr lang="en-US" dirty="0" smtClean="0">
                 <a:latin typeface="Times New Roman" pitchFamily="18" charset="0"/>
                 <a:cs typeface="Times New Roman" pitchFamily="18" charset="0"/>
               </a:rPr>
@@ -3965,49 +3965,49 @@
           <a:p>
             <a:pPr algn="just"/>
             <a:r>
-              <a:rPr lang="en-US" sz="2200" dirty="0" smtClean="0">
+              <a:rPr lang="en-US" dirty="0" smtClean="0">
                 <a:latin typeface="Times New Roman" pitchFamily="18" charset="0"/>
                 <a:cs typeface="Times New Roman" pitchFamily="18" charset="0"/>
               </a:rPr>
               <a:t>  &lt;</a:t>
             </a:r>
             <a:r>
-              <a:rPr lang="en-US" sz="2200" dirty="0" err="1" smtClean="0">
+              <a:rPr lang="en-US" dirty="0" err="1" smtClean="0">
                 <a:latin typeface="Times New Roman" pitchFamily="18" charset="0"/>
                 <a:cs typeface="Times New Roman" pitchFamily="18" charset="0"/>
               </a:rPr>
               <a:t>img</a:t>
             </a:r>
             <a:r>
-              <a:rPr lang="en-US" sz="2200" dirty="0" smtClean="0">
+              <a:rPr lang="en-US" dirty="0" smtClean="0">
                 <a:latin typeface="Times New Roman" pitchFamily="18" charset="0"/>
                 <a:cs typeface="Times New Roman" pitchFamily="18" charset="0"/>
               </a:rPr>
               <a:t> </a:t>
             </a:r>
             <a:r>
-              <a:rPr lang="en-US" sz="2200" dirty="0" err="1" smtClean="0">
+              <a:rPr lang="en-US" dirty="0" err="1" smtClean="0">
                 <a:latin typeface="Times New Roman" pitchFamily="18" charset="0"/>
                 <a:cs typeface="Times New Roman" pitchFamily="18" charset="0"/>
               </a:rPr>
               <a:t>src</a:t>
             </a:r>
             <a:r>
-              <a:rPr lang="en-US" sz="2200" dirty="0" smtClean="0">
+              <a:rPr lang="en-US" dirty="0" smtClean="0">
                 <a:latin typeface="Times New Roman" pitchFamily="18" charset="0"/>
                 <a:cs typeface="Times New Roman" pitchFamily="18" charset="0"/>
               </a:rPr>
               <a:t>= " </a:t>
             </a:r>
             <a:r>
-              <a:rPr lang="ru-RU" sz="2200" dirty="0" smtClean="0">
+              <a:rPr lang="ru-RU" dirty="0" smtClean="0">
                 <a:latin typeface="Times New Roman" pitchFamily="18" charset="0"/>
                 <a:cs typeface="Times New Roman" pitchFamily="18" charset="0"/>
               </a:rPr>
               <a:t>…</a:t>
             </a:r>
             <a:r>
-              <a:rPr lang="en-US" sz="2200" dirty="0" smtClean="0">
+              <a:rPr lang="en-US" dirty="0" smtClean="0">
                 <a:latin typeface="Times New Roman" pitchFamily="18" charset="0"/>
                 <a:cs typeface="Times New Roman" pitchFamily="18" charset="0"/>
               </a:rPr>
@@ -4017,13 +4017,51 @@
           <a:p>
             <a:pPr algn="just"/>
             <a:r>
-              <a:rPr lang="en-US" sz="2200" dirty="0" smtClean="0">
+              <a:rPr lang="en-US" dirty="0" smtClean="0">
                 <a:latin typeface="Times New Roman" pitchFamily="18" charset="0"/>
                 <a:cs typeface="Times New Roman" pitchFamily="18" charset="0"/>
               </a:rPr>
-              <a:t>&lt;/div&gt;</a:t>
-            </a:r>
-            <a:endParaRPr lang="ru-RU" sz="2200" dirty="0">
+              <a:t>&lt;/div</a:t>
+            </a:r>
+            <a:r>
+              <a:rPr lang="en-US" dirty="0" smtClean="0">
+                <a:latin typeface="Times New Roman" pitchFamily="18" charset="0"/>
+                <a:cs typeface="Times New Roman" pitchFamily="18" charset="0"/>
+              </a:rPr>
+              <a:t>&gt;</a:t>
+            </a:r>
+          </a:p>
+          <a:p>
+            <a:pPr algn="just"/>
+            <a:r>
+              <a:rPr lang="ru-RU" dirty="0" smtClean="0">
+                <a:latin typeface="Times New Roman" pitchFamily="18" charset="0"/>
+                <a:cs typeface="Times New Roman" pitchFamily="18" charset="0"/>
+              </a:rPr>
+              <a:t>А также </a:t>
+            </a:r>
+            <a:r>
+              <a:rPr lang="en-US" dirty="0" smtClean="0">
+                <a:latin typeface="Times New Roman" pitchFamily="18" charset="0"/>
+                <a:cs typeface="Times New Roman" pitchFamily="18" charset="0"/>
+              </a:rPr>
+              <a:t>&lt;span style="color: </a:t>
+            </a:r>
+            <a:r>
+              <a:rPr lang="en-US" dirty="0" smtClean="0">
+                <a:latin typeface="Times New Roman" pitchFamily="18" charset="0"/>
+                <a:cs typeface="Times New Roman" pitchFamily="18" charset="0"/>
+              </a:rPr>
+              <a:t>red; </a:t>
+            </a:r>
+            <a:r>
+              <a:rPr lang="en-US" dirty="0" smtClean="0">
+                <a:latin typeface="Times New Roman" pitchFamily="18" charset="0"/>
+                <a:cs typeface="Times New Roman" pitchFamily="18" charset="0"/>
+              </a:rPr>
+              <a:t>font-weight: bold;"&gt;В&lt;/span&gt;</a:t>
+            </a:r>
+            <a:endParaRPr lang="ru-RU" dirty="0">
               <a:latin typeface="Times New Roman" pitchFamily="18" charset="0"/>
               <a:cs typeface="Times New Roman" pitchFamily="18" charset="0"/>
             </a:endParaRPr>
@@ -4236,7 +4274,7 @@
         <p:spPr>
           <a:xfrm>
             <a:off x="-30856" y="0"/>
-            <a:ext cx="6115024" cy="6001643"/>
+            <a:ext cx="6115024" cy="5786199"/>
           </a:xfrm>
           <a:prstGeom prst="rect">
             <a:avLst/>
@@ -4283,7 +4321,7 @@
               <a:buChar char="•"/>
             </a:pPr>
             <a:r>
-              <a:rPr lang="ru-RU" sz="2400" dirty="0" smtClean="0">
+              <a:rPr lang="ru-RU" sz="2300" b="1" dirty="0" smtClean="0">
                 <a:latin typeface="Times New Roman" panose="02020603050405020304" pitchFamily="18" charset="0"/>
                 <a:ea typeface="Times New Roman" panose="02020603050405020304" pitchFamily="18" charset="0"/>
                 <a:cs typeface="Times New Roman" panose="02020603050405020304" pitchFamily="18" charset="0"/>
@@ -4291,38 +4329,46 @@
               <a:t>Анимация </a:t>
             </a:r>
             <a:r>
-              <a:rPr lang="ru-RU" sz="2400" dirty="0">
+              <a:rPr lang="ru-RU" sz="2300" b="1" dirty="0">
                 <a:latin typeface="Times New Roman" panose="02020603050405020304" pitchFamily="18" charset="0"/>
                 <a:ea typeface="Times New Roman" panose="02020603050405020304" pitchFamily="18" charset="0"/>
                 <a:cs typeface="Times New Roman" panose="02020603050405020304" pitchFamily="18" charset="0"/>
               </a:rPr>
-              <a:t>появления. Реализуйте плавное появление текста при загрузке страницы (</a:t>
-            </a:r>
-            <a:r>
-              <a:rPr lang="ru-RU" sz="2400" dirty="0" err="1">
+              <a:t>появления.</a:t>
+            </a:r>
+            <a:r>
+              <a:rPr lang="ru-RU" sz="2300" dirty="0">
                 <a:latin typeface="Times New Roman" panose="02020603050405020304" pitchFamily="18" charset="0"/>
                 <a:ea typeface="Times New Roman" panose="02020603050405020304" pitchFamily="18" charset="0"/>
                 <a:cs typeface="Times New Roman" panose="02020603050405020304" pitchFamily="18" charset="0"/>
               </a:rPr>
-              <a:t>fade‑in</a:t>
-            </a:r>
-            <a:r>
-              <a:rPr lang="ru-RU" sz="2400" dirty="0">
+              <a:t> Реализуйте плавное появление текста при загрузке страницы (</a:t>
+            </a:r>
+            <a:r>
+              <a:rPr lang="ru-RU" sz="2300" dirty="0" err="1">
                 <a:latin typeface="Times New Roman" panose="02020603050405020304" pitchFamily="18" charset="0"/>
                 <a:ea typeface="Times New Roman" panose="02020603050405020304" pitchFamily="18" charset="0"/>
                 <a:cs typeface="Times New Roman" panose="02020603050405020304" pitchFamily="18" charset="0"/>
               </a:rPr>
-              <a:t>) или эффект пульсации цвета</a:t>
-            </a:r>
-            <a:r>
-              <a:rPr lang="ru-RU" sz="2400" dirty="0" smtClean="0">
+              <a:t>fade‑in</a:t>
+            </a:r>
+            <a:r>
+              <a:rPr lang="ru-RU" sz="2300" dirty="0">
                 <a:latin typeface="Times New Roman" panose="02020603050405020304" pitchFamily="18" charset="0"/>
                 <a:ea typeface="Times New Roman" panose="02020603050405020304" pitchFamily="18" charset="0"/>
                 <a:cs typeface="Times New Roman" panose="02020603050405020304" pitchFamily="18" charset="0"/>
               </a:rPr>
+              <a:t>) или эффект пульсации цвета</a:t>
+            </a:r>
+            <a:r>
+              <a:rPr lang="ru-RU" sz="2300" dirty="0" smtClean="0">
+                <a:latin typeface="Times New Roman" panose="02020603050405020304" pitchFamily="18" charset="0"/>
+                <a:ea typeface="Times New Roman" panose="02020603050405020304" pitchFamily="18" charset="0"/>
+                <a:cs typeface="Times New Roman" panose="02020603050405020304" pitchFamily="18" charset="0"/>
+              </a:rPr>
               <a:t>.</a:t>
             </a:r>
-            <a:endParaRPr lang="ru-RU" sz="2400" dirty="0">
+            <a:endParaRPr lang="ru-RU" sz="2300" dirty="0">
               <a:latin typeface="Times New Roman" panose="02020603050405020304" pitchFamily="18" charset="0"/>
               <a:ea typeface="Times New Roman" panose="02020603050405020304" pitchFamily="18" charset="0"/>
               <a:cs typeface="Times New Roman" panose="02020603050405020304" pitchFamily="18" charset="0"/>
@@ -4337,39 +4383,47 @@
               <a:buChar char="•"/>
             </a:pPr>
             <a:r>
-              <a:rPr lang="ru-RU" sz="2400" dirty="0">
+              <a:rPr lang="ru-RU" sz="2300" b="1" dirty="0">
                 <a:latin typeface="Times New Roman" panose="02020603050405020304" pitchFamily="18" charset="0"/>
                 <a:ea typeface="Times New Roman" panose="02020603050405020304" pitchFamily="18" charset="0"/>
                 <a:cs typeface="Times New Roman" panose="02020603050405020304" pitchFamily="18" charset="0"/>
               </a:rPr>
-              <a:t>Вложенные списки. Создайте многоуровневый список (например, к каждому предмету список заданий). Используйте &lt;</a:t>
-            </a:r>
-            <a:r>
-              <a:rPr lang="ru-RU" sz="2400" dirty="0" err="1">
+              <a:t>Вложенные списки. </a:t>
+            </a:r>
+            <a:r>
+              <a:rPr lang="ru-RU" sz="2300" dirty="0">
                 <a:latin typeface="Times New Roman" panose="02020603050405020304" pitchFamily="18" charset="0"/>
                 <a:ea typeface="Times New Roman" panose="02020603050405020304" pitchFamily="18" charset="0"/>
                 <a:cs typeface="Times New Roman" panose="02020603050405020304" pitchFamily="18" charset="0"/>
               </a:rPr>
-              <a:t>ol</a:t>
-            </a:r>
-            <a:r>
-              <a:rPr lang="ru-RU" sz="2400" dirty="0">
+              <a:t>Создайте многоуровневый список (например, к каждому предмету список заданий). Используйте &lt;</a:t>
+            </a:r>
+            <a:r>
+              <a:rPr lang="ru-RU" sz="2300" dirty="0" err="1">
                 <a:latin typeface="Times New Roman" panose="02020603050405020304" pitchFamily="18" charset="0"/>
                 <a:ea typeface="Times New Roman" panose="02020603050405020304" pitchFamily="18" charset="0"/>
                 <a:cs typeface="Times New Roman" panose="02020603050405020304" pitchFamily="18" charset="0"/>
               </a:rPr>
-              <a:t>&gt; внутри &lt;</a:t>
-            </a:r>
-            <a:r>
-              <a:rPr lang="ru-RU" sz="2400" dirty="0" err="1">
+              <a:t>ol</a:t>
+            </a:r>
+            <a:r>
+              <a:rPr lang="ru-RU" sz="2300" dirty="0">
                 <a:latin typeface="Times New Roman" panose="02020603050405020304" pitchFamily="18" charset="0"/>
                 <a:ea typeface="Times New Roman" panose="02020603050405020304" pitchFamily="18" charset="0"/>
                 <a:cs typeface="Times New Roman" panose="02020603050405020304" pitchFamily="18" charset="0"/>
               </a:rPr>
+              <a:t>&gt; внутри &lt;</a:t>
+            </a:r>
+            <a:r>
+              <a:rPr lang="ru-RU" sz="2300" dirty="0" err="1">
+                <a:latin typeface="Times New Roman" panose="02020603050405020304" pitchFamily="18" charset="0"/>
+                <a:ea typeface="Times New Roman" panose="02020603050405020304" pitchFamily="18" charset="0"/>
+                <a:cs typeface="Times New Roman" panose="02020603050405020304" pitchFamily="18" charset="0"/>
+              </a:rPr>
               <a:t>li</a:t>
             </a:r>
             <a:r>
-              <a:rPr lang="ru-RU" sz="2400" dirty="0">
+              <a:rPr lang="ru-RU" sz="2300" dirty="0">
                 <a:latin typeface="Times New Roman" panose="02020603050405020304" pitchFamily="18" charset="0"/>
                 <a:ea typeface="Times New Roman" panose="02020603050405020304" pitchFamily="18" charset="0"/>
                 <a:cs typeface="Times New Roman" panose="02020603050405020304" pitchFamily="18" charset="0"/>
@@ -4386,12 +4440,20 @@
               <a:buChar char="•"/>
             </a:pPr>
             <a:r>
-              <a:rPr lang="ru-RU" sz="2400" dirty="0">
+              <a:rPr lang="ru-RU" sz="2300" b="1" dirty="0">
                 <a:latin typeface="Times New Roman" panose="02020603050405020304" pitchFamily="18" charset="0"/>
                 <a:ea typeface="Times New Roman" panose="02020603050405020304" pitchFamily="18" charset="0"/>
                 <a:cs typeface="Times New Roman" panose="02020603050405020304" pitchFamily="18" charset="0"/>
               </a:rPr>
-              <a:t>В таблице добавьте еще одну строку: объедините первые два столбца, а в последнем впишите сумму в рублях</a:t>
+              <a:t>В таблице добавьте еще одну строку</a:t>
+            </a:r>
+            <a:r>
+              <a:rPr lang="ru-RU" sz="2300" dirty="0">
+                <a:latin typeface="Times New Roman" panose="02020603050405020304" pitchFamily="18" charset="0"/>
+                <a:ea typeface="Times New Roman" panose="02020603050405020304" pitchFamily="18" charset="0"/>
+                <a:cs typeface="Times New Roman" panose="02020603050405020304" pitchFamily="18" charset="0"/>
+              </a:rPr>
+              <a:t>: объедините первые два столбца, а в последнем впишите сумму в рублях</a:t>
             </a:r>
           </a:p>
           <a:p>
@@ -4403,62 +4465,70 @@
               <a:buChar char="•"/>
             </a:pPr>
             <a:r>
-              <a:rPr lang="ru-RU" sz="2400" dirty="0">
+              <a:rPr lang="ru-RU" sz="2300" b="1" dirty="0">
                 <a:latin typeface="Times New Roman" panose="02020603050405020304" pitchFamily="18" charset="0"/>
                 <a:ea typeface="Times New Roman" panose="02020603050405020304" pitchFamily="18" charset="0"/>
                 <a:cs typeface="Times New Roman" panose="02020603050405020304" pitchFamily="18" charset="0"/>
               </a:rPr>
-              <a:t>Эффект увеличения. При наведении изображение увеличивается на 10 % с плавным переходом (</a:t>
-            </a:r>
-            <a:r>
-              <a:rPr lang="ru-RU" sz="2400" dirty="0" err="1">
+              <a:t>Эффект увеличения. </a:t>
+            </a:r>
+            <a:r>
+              <a:rPr lang="ru-RU" sz="2300" dirty="0">
                 <a:latin typeface="Times New Roman" panose="02020603050405020304" pitchFamily="18" charset="0"/>
                 <a:ea typeface="Times New Roman" panose="02020603050405020304" pitchFamily="18" charset="0"/>
                 <a:cs typeface="Times New Roman" panose="02020603050405020304" pitchFamily="18" charset="0"/>
               </a:rPr>
-              <a:t>transform</a:t>
-            </a:r>
-            <a:r>
-              <a:rPr lang="ru-RU" sz="2400" dirty="0">
+              <a:t>При наведении изображение увеличивается на 10 % с плавным переходом (</a:t>
+            </a:r>
+            <a:r>
+              <a:rPr lang="ru-RU" sz="2300" dirty="0" err="1">
                 <a:latin typeface="Times New Roman" panose="02020603050405020304" pitchFamily="18" charset="0"/>
                 <a:ea typeface="Times New Roman" panose="02020603050405020304" pitchFamily="18" charset="0"/>
                 <a:cs typeface="Times New Roman" panose="02020603050405020304" pitchFamily="18" charset="0"/>
               </a:rPr>
-              <a:t>: </a:t>
-            </a:r>
-            <a:r>
-              <a:rPr lang="ru-RU" sz="2400" dirty="0" err="1">
+              <a:t>transform</a:t>
+            </a:r>
+            <a:r>
+              <a:rPr lang="ru-RU" sz="2300" dirty="0">
                 <a:latin typeface="Times New Roman" panose="02020603050405020304" pitchFamily="18" charset="0"/>
                 <a:ea typeface="Times New Roman" panose="02020603050405020304" pitchFamily="18" charset="0"/>
                 <a:cs typeface="Times New Roman" panose="02020603050405020304" pitchFamily="18" charset="0"/>
               </a:rPr>
-              <a:t>scale</a:t>
-            </a:r>
-            <a:r>
-              <a:rPr lang="ru-RU" sz="2400" dirty="0">
+              <a:t>: </a:t>
+            </a:r>
+            <a:r>
+              <a:rPr lang="ru-RU" sz="2300" dirty="0" err="1">
                 <a:latin typeface="Times New Roman" panose="02020603050405020304" pitchFamily="18" charset="0"/>
                 <a:ea typeface="Times New Roman" panose="02020603050405020304" pitchFamily="18" charset="0"/>
                 <a:cs typeface="Times New Roman" panose="02020603050405020304" pitchFamily="18" charset="0"/>
               </a:rPr>
-              <a:t>(1.1) + </a:t>
-            </a:r>
-            <a:r>
-              <a:rPr lang="ru-RU" sz="2400" dirty="0" err="1">
+              <a:t>scale</a:t>
+            </a:r>
+            <a:r>
+              <a:rPr lang="ru-RU" sz="2300" dirty="0">
                 <a:latin typeface="Times New Roman" panose="02020603050405020304" pitchFamily="18" charset="0"/>
                 <a:ea typeface="Times New Roman" panose="02020603050405020304" pitchFamily="18" charset="0"/>
                 <a:cs typeface="Times New Roman" panose="02020603050405020304" pitchFamily="18" charset="0"/>
               </a:rPr>
-              <a:t>transition</a:t>
-            </a:r>
-            <a:r>
-              <a:rPr lang="ru-RU" sz="2400" dirty="0" smtClean="0">
+              <a:t>(1.1) + </a:t>
+            </a:r>
+            <a:r>
+              <a:rPr lang="ru-RU" sz="2300" dirty="0" err="1">
                 <a:latin typeface="Times New Roman" panose="02020603050405020304" pitchFamily="18" charset="0"/>
                 <a:ea typeface="Times New Roman" panose="02020603050405020304" pitchFamily="18" charset="0"/>
                 <a:cs typeface="Times New Roman" panose="02020603050405020304" pitchFamily="18" charset="0"/>
               </a:rPr>
+              <a:t>transition</a:t>
+            </a:r>
+            <a:r>
+              <a:rPr lang="ru-RU" sz="2300" dirty="0" smtClean="0">
+                <a:latin typeface="Times New Roman" panose="02020603050405020304" pitchFamily="18" charset="0"/>
+                <a:ea typeface="Times New Roman" panose="02020603050405020304" pitchFamily="18" charset="0"/>
+                <a:cs typeface="Times New Roman" panose="02020603050405020304" pitchFamily="18" charset="0"/>
+              </a:rPr>
               <a:t>).</a:t>
             </a:r>
-            <a:endParaRPr lang="ru-RU" sz="2400" dirty="0">
+            <a:endParaRPr lang="ru-RU" sz="2300" dirty="0">
               <a:latin typeface="Times New Roman" panose="02020603050405020304" pitchFamily="18" charset="0"/>
               <a:ea typeface="Times New Roman" panose="02020603050405020304" pitchFamily="18" charset="0"/>
               <a:cs typeface="Times New Roman" panose="02020603050405020304" pitchFamily="18" charset="0"/>
@@ -4657,7 +4727,7 @@
     </p:spTree>
     <p:extLst>
       <p:ext uri="{BB962C8B-B14F-4D97-AF65-F5344CB8AC3E}">
-        <p14:creationId xmlns:p14="http://schemas.microsoft.com/office/powerpoint/2010/main" xmlns="" val="857370114"/>
+        <p14:creationId xmlns="" xmlns:p14="http://schemas.microsoft.com/office/powerpoint/2010/main" val="857370114"/>
       </p:ext>
     </p:extLst>
   </p:cSld>
@@ -4809,40 +4879,24 @@
               <a:buChar char="•"/>
             </a:pPr>
             <a:r>
+              <a:rPr lang="ru-RU" sz="2400" b="1" dirty="0">
+                <a:latin typeface="Times New Roman" panose="02020603050405020304" pitchFamily="18" charset="0"/>
+                <a:ea typeface="Times New Roman" panose="02020603050405020304" pitchFamily="18" charset="0"/>
+                <a:cs typeface="Times New Roman" panose="02020603050405020304" pitchFamily="18" charset="0"/>
+              </a:rPr>
+              <a:t>Активное состояние ссылки</a:t>
+            </a:r>
+            <a:r>
               <a:rPr lang="ru-RU" sz="2400" dirty="0">
                 <a:latin typeface="Times New Roman" panose="02020603050405020304" pitchFamily="18" charset="0"/>
                 <a:ea typeface="Times New Roman" panose="02020603050405020304" pitchFamily="18" charset="0"/>
                 <a:cs typeface="Times New Roman" panose="02020603050405020304" pitchFamily="18" charset="0"/>
               </a:rPr>
-              <a:t>Активное состояние ссылки. Выделите текущую активную ссылку в меню (подсветка или подчёркивание) при переходе к разделу.</a:t>
-            </a:r>
-          </a:p>
-        </p:txBody>
-      </p:sp>
-      <p:pic>
-        <p:nvPicPr>
-          <p:cNvPr id="5" name="Рисунок 4"/>
-          <p:cNvPicPr>
-            <a:picLocks noChangeAspect="1"/>
-          </p:cNvPicPr>
-          <p:nvPr/>
-        </p:nvPicPr>
-        <p:blipFill>
-          <a:blip r:embed="rId3"/>
-          <a:stretch>
-            <a:fillRect/>
-          </a:stretch>
-        </p:blipFill>
-        <p:spPr>
-          <a:xfrm>
-            <a:off x="3563888" y="2506062"/>
-            <a:ext cx="5580112" cy="4352161"/>
-          </a:xfrm>
-          <a:prstGeom prst="rect">
-            <a:avLst/>
-          </a:prstGeom>
-        </p:spPr>
-      </p:pic>
+              <a:t>. Выделите текущую активную ссылку в меню (подсветка или подчёркивание) при переходе к разделу.</a:t>
+            </a:r>
+          </a:p>
+        </p:txBody>
+      </p:sp>
       <p:sp>
         <p:nvSpPr>
           <p:cNvPr id="6" name="Прямоугольник 5"/>
@@ -4872,7 +4926,7 @@
               <a:buChar char="•"/>
             </a:pPr>
             <a:r>
-              <a:rPr lang="ru-RU" sz="2400" dirty="0" smtClean="0">
+              <a:rPr lang="ru-RU" sz="2400" b="1" dirty="0" smtClean="0">
                 <a:latin typeface="Times New Roman" panose="02020603050405020304" pitchFamily="18" charset="0"/>
                 <a:ea typeface="Times New Roman" panose="02020603050405020304" pitchFamily="18" charset="0"/>
                 <a:cs typeface="Times New Roman" panose="02020603050405020304" pitchFamily="18" charset="0"/>
@@ -4880,7 +4934,7 @@
               <a:t>Оформите титульную страницу с помощью </a:t>
             </a:r>
             <a:r>
-              <a:rPr lang="en-US" sz="2400" dirty="0" err="1" smtClean="0">
+              <a:rPr lang="en-US" sz="2400" b="1" dirty="0" err="1" smtClean="0">
                 <a:latin typeface="Times New Roman" panose="02020603050405020304" pitchFamily="18" charset="0"/>
                 <a:ea typeface="Times New Roman" panose="02020603050405020304" pitchFamily="18" charset="0"/>
                 <a:cs typeface="Times New Roman" panose="02020603050405020304" pitchFamily="18" charset="0"/>
@@ -4888,7 +4942,7 @@
               <a:t>css</a:t>
             </a:r>
             <a:r>
-              <a:rPr lang="en-US" sz="2400" dirty="0" smtClean="0">
+              <a:rPr lang="en-US" sz="2400" b="1" dirty="0" smtClean="0">
                 <a:latin typeface="Times New Roman" panose="02020603050405020304" pitchFamily="18" charset="0"/>
                 <a:ea typeface="Times New Roman" panose="02020603050405020304" pitchFamily="18" charset="0"/>
                 <a:cs typeface="Times New Roman" panose="02020603050405020304" pitchFamily="18" charset="0"/>
@@ -4896,14 +4950,14 @@
               <a:t> </a:t>
             </a:r>
             <a:r>
-              <a:rPr lang="ru-RU" sz="2400" dirty="0" smtClean="0">
+              <a:rPr lang="ru-RU" sz="2400" b="1" dirty="0" smtClean="0">
                 <a:latin typeface="Times New Roman" panose="02020603050405020304" pitchFamily="18" charset="0"/>
                 <a:ea typeface="Times New Roman" panose="02020603050405020304" pitchFamily="18" charset="0"/>
                 <a:cs typeface="Times New Roman" panose="02020603050405020304" pitchFamily="18" charset="0"/>
               </a:rPr>
-              <a:t>стилей.</a:t>
-            </a:r>
-            <a:endParaRPr lang="ru-RU" sz="2400" dirty="0">
+              <a:t>стилей</a:t>
+            </a:r>
+            <a:endParaRPr lang="ru-RU" sz="2400" b="1" dirty="0">
               <a:latin typeface="Times New Roman" panose="02020603050405020304" pitchFamily="18" charset="0"/>
               <a:ea typeface="Times New Roman" panose="02020603050405020304" pitchFamily="18" charset="0"/>
               <a:cs typeface="Times New Roman" panose="02020603050405020304" pitchFamily="18" charset="0"/>
@@ -4922,7 +4976,7 @@
         <p:spPr>
           <a:xfrm>
             <a:off x="2915816" y="5618435"/>
-            <a:ext cx="792088" cy="834901"/>
+            <a:ext cx="1156118" cy="596647"/>
           </a:xfrm>
           <a:prstGeom prst="straightConnector1">
             <a:avLst/>
@@ -5002,10 +5056,43 @@
           </a:p>
         </p:txBody>
       </p:sp>
+      <p:pic>
+        <p:nvPicPr>
+          <p:cNvPr id="1026" name="Picture 2"/>
+          <p:cNvPicPr>
+            <a:picLocks noChangeAspect="1" noChangeArrowheads="1"/>
+          </p:cNvPicPr>
+          <p:nvPr/>
+        </p:nvPicPr>
+        <p:blipFill>
+          <a:blip r:embed="rId3"/>
+          <a:srcRect/>
+          <a:stretch>
+            <a:fillRect/>
+          </a:stretch>
+        </p:blipFill>
+        <p:spPr bwMode="auto">
+          <a:xfrm>
+            <a:off x="4031794" y="2644854"/>
+            <a:ext cx="5112206" cy="4213146"/>
+          </a:xfrm>
+          <a:prstGeom prst="rect">
+            <a:avLst/>
+          </a:prstGeom>
+          <a:noFill/>
+          <a:ln w="9525">
+            <a:noFill/>
+            <a:miter lim="800000"/>
+            <a:headEnd/>
+            <a:tailEnd/>
+          </a:ln>
+          <a:effectLst/>
+        </p:spPr>
+      </p:pic>
     </p:spTree>
     <p:extLst>
       <p:ext uri="{BB962C8B-B14F-4D97-AF65-F5344CB8AC3E}">
-        <p14:creationId xmlns:p14="http://schemas.microsoft.com/office/powerpoint/2010/main" xmlns="" val="258133396"/>
+        <p14:creationId xmlns="" xmlns:p14="http://schemas.microsoft.com/office/powerpoint/2010/main" val="258133396"/>
       </p:ext>
     </p:extLst>
   </p:cSld>
